--- a/ppt/PythonMath04-PIP.pptx
+++ b/ppt/PythonMath04-PIP.pptx
@@ -605,35 +605,35 @@
           <a:p>
             <a:pPr lvl="0"/>
             <a:r>
-              <a:rPr lang="fr-FR" noProof="0" smtClean="0"/>
+              <a:rPr lang="fr-FR" noProof="0"/>
               <a:t>Cliquez pour modifier les styles du texte du masque</a:t>
             </a:r>
           </a:p>
           <a:p>
             <a:pPr lvl="1"/>
             <a:r>
-              <a:rPr lang="fr-FR" noProof="0" smtClean="0"/>
+              <a:rPr lang="fr-FR" noProof="0"/>
               <a:t>Deuxième niveau</a:t>
             </a:r>
           </a:p>
           <a:p>
             <a:pPr lvl="2"/>
             <a:r>
-              <a:rPr lang="fr-FR" noProof="0" smtClean="0"/>
+              <a:rPr lang="fr-FR" noProof="0"/>
               <a:t>Troisième niveau</a:t>
             </a:r>
           </a:p>
           <a:p>
             <a:pPr lvl="3"/>
             <a:r>
-              <a:rPr lang="fr-FR" noProof="0" smtClean="0"/>
+              <a:rPr lang="fr-FR" noProof="0"/>
               <a:t>Quatrième niveau</a:t>
             </a:r>
           </a:p>
           <a:p>
             <a:pPr lvl="4"/>
             <a:r>
-              <a:rPr lang="fr-FR" noProof="0" smtClean="0"/>
+              <a:rPr lang="fr-FR" noProof="0"/>
               <a:t>Cinquième niveau</a:t>
             </a:r>
           </a:p>
@@ -921,10 +921,9 @@
           <a:lstStyle/>
           <a:p>
             <a:r>
-              <a:rPr lang="fr-FR" smtClean="0"/>
+              <a:rPr lang="fr-FR"/>
               <a:t>Cliquez pour modifier le style du titre</a:t>
             </a:r>
-            <a:endParaRPr lang="fr-FR"/>
           </a:p>
         </p:txBody>
       </p:sp>
@@ -986,10 +985,9 @@
           </a:lstStyle>
           <a:p>
             <a:r>
-              <a:rPr lang="fr-FR" smtClean="0"/>
+              <a:rPr lang="fr-FR"/>
               <a:t>Cliquez pour modifier le style des sous-titres du masque</a:t>
             </a:r>
-            <a:endParaRPr lang="fr-FR"/>
           </a:p>
         </p:txBody>
       </p:sp>
@@ -1044,10 +1042,9 @@
           <a:lstStyle/>
           <a:p>
             <a:r>
-              <a:rPr lang="fr-FR" smtClean="0"/>
+              <a:rPr lang="fr-FR"/>
               <a:t>Cliquez pour modifier le style du titre</a:t>
             </a:r>
-            <a:endParaRPr lang="fr-FR"/>
           </a:p>
         </p:txBody>
       </p:sp>
@@ -1073,38 +1070,37 @@
           <a:p>
             <a:pPr lvl="0"/>
             <a:r>
-              <a:rPr lang="fr-FR" smtClean="0"/>
+              <a:rPr lang="fr-FR"/>
               <a:t>Cliquez pour modifier les styles du texte du masque</a:t>
             </a:r>
           </a:p>
           <a:p>
             <a:pPr lvl="1"/>
             <a:r>
-              <a:rPr lang="fr-FR" smtClean="0"/>
+              <a:rPr lang="fr-FR"/>
               <a:t>Deuxième niveau</a:t>
             </a:r>
           </a:p>
           <a:p>
             <a:pPr lvl="2"/>
             <a:r>
-              <a:rPr lang="fr-FR" smtClean="0"/>
+              <a:rPr lang="fr-FR"/>
               <a:t>Troisième niveau</a:t>
             </a:r>
           </a:p>
           <a:p>
             <a:pPr lvl="3"/>
             <a:r>
-              <a:rPr lang="fr-FR" smtClean="0"/>
+              <a:rPr lang="fr-FR"/>
               <a:t>Quatrième niveau</a:t>
             </a:r>
           </a:p>
           <a:p>
             <a:pPr lvl="4"/>
             <a:r>
-              <a:rPr lang="fr-FR" smtClean="0"/>
+              <a:rPr lang="fr-FR"/>
               <a:t>Cinquième niveau</a:t>
             </a:r>
-            <a:endParaRPr lang="fr-FR"/>
           </a:p>
         </p:txBody>
       </p:sp>
@@ -1163,10 +1159,9 @@
           </a:lstStyle>
           <a:p>
             <a:r>
-              <a:rPr lang="fr-FR" dirty="0" smtClean="0"/>
+              <a:rPr lang="fr-FR" dirty="0"/>
               <a:t>Cliquez pour modifier le style du titre</a:t>
             </a:r>
-            <a:endParaRPr lang="fr-FR" dirty="0"/>
           </a:p>
         </p:txBody>
       </p:sp>
@@ -1192,38 +1187,37 @@
           <a:p>
             <a:pPr lvl="0"/>
             <a:r>
-              <a:rPr lang="fr-FR" dirty="0" smtClean="0"/>
+              <a:rPr lang="fr-FR" dirty="0"/>
               <a:t>Cliquez pour modifier les styles du texte du masque</a:t>
             </a:r>
           </a:p>
           <a:p>
             <a:pPr lvl="1"/>
             <a:r>
-              <a:rPr lang="fr-FR" dirty="0" smtClean="0"/>
+              <a:rPr lang="fr-FR" dirty="0"/>
               <a:t>Deuxième niveau</a:t>
             </a:r>
           </a:p>
           <a:p>
             <a:pPr lvl="2"/>
             <a:r>
-              <a:rPr lang="fr-FR" dirty="0" smtClean="0"/>
+              <a:rPr lang="fr-FR" dirty="0"/>
               <a:t>Troisième niveau</a:t>
             </a:r>
           </a:p>
           <a:p>
             <a:pPr lvl="3"/>
             <a:r>
-              <a:rPr lang="fr-FR" dirty="0" smtClean="0"/>
+              <a:rPr lang="fr-FR" dirty="0"/>
               <a:t>Quatrième niveau</a:t>
             </a:r>
           </a:p>
           <a:p>
             <a:pPr lvl="4"/>
             <a:r>
-              <a:rPr lang="fr-FR" dirty="0" smtClean="0"/>
+              <a:rPr lang="fr-FR" dirty="0"/>
               <a:t>Cinquième niveau</a:t>
             </a:r>
-            <a:endParaRPr lang="fr-FR" dirty="0"/>
           </a:p>
         </p:txBody>
       </p:sp>
@@ -1273,10 +1267,9 @@
           <a:lstStyle/>
           <a:p>
             <a:r>
-              <a:rPr lang="fr-FR" smtClean="0"/>
+              <a:rPr lang="fr-FR"/>
               <a:t>Cliquez pour modifier le style du titre</a:t>
             </a:r>
-            <a:endParaRPr lang="fr-FR"/>
           </a:p>
         </p:txBody>
       </p:sp>
@@ -1330,38 +1323,37 @@
           <a:p>
             <a:pPr lvl="0"/>
             <a:r>
-              <a:rPr lang="fr-FR" smtClean="0"/>
+              <a:rPr lang="fr-FR"/>
               <a:t>Cliquez pour modifier les styles du texte du masque</a:t>
             </a:r>
           </a:p>
           <a:p>
             <a:pPr lvl="1"/>
             <a:r>
-              <a:rPr lang="fr-FR" smtClean="0"/>
+              <a:rPr lang="fr-FR"/>
               <a:t>Deuxième niveau</a:t>
             </a:r>
           </a:p>
           <a:p>
             <a:pPr lvl="2"/>
             <a:r>
-              <a:rPr lang="fr-FR" smtClean="0"/>
+              <a:rPr lang="fr-FR"/>
               <a:t>Troisième niveau</a:t>
             </a:r>
           </a:p>
           <a:p>
             <a:pPr lvl="3"/>
             <a:r>
-              <a:rPr lang="fr-FR" smtClean="0"/>
+              <a:rPr lang="fr-FR"/>
               <a:t>Quatrième niveau</a:t>
             </a:r>
           </a:p>
           <a:p>
             <a:pPr lvl="4"/>
             <a:r>
-              <a:rPr lang="fr-FR" smtClean="0"/>
+              <a:rPr lang="fr-FR"/>
               <a:t>Cinquième niveau</a:t>
             </a:r>
-            <a:endParaRPr lang="fr-FR"/>
           </a:p>
         </p:txBody>
       </p:sp>
@@ -1415,38 +1407,37 @@
           <a:p>
             <a:pPr lvl="0"/>
             <a:r>
-              <a:rPr lang="fr-FR" smtClean="0"/>
+              <a:rPr lang="fr-FR"/>
               <a:t>Cliquez pour modifier les styles du texte du masque</a:t>
             </a:r>
           </a:p>
           <a:p>
             <a:pPr lvl="1"/>
             <a:r>
-              <a:rPr lang="fr-FR" smtClean="0"/>
+              <a:rPr lang="fr-FR"/>
               <a:t>Deuxième niveau</a:t>
             </a:r>
           </a:p>
           <a:p>
             <a:pPr lvl="2"/>
             <a:r>
-              <a:rPr lang="fr-FR" smtClean="0"/>
+              <a:rPr lang="fr-FR"/>
               <a:t>Troisième niveau</a:t>
             </a:r>
           </a:p>
           <a:p>
             <a:pPr lvl="3"/>
             <a:r>
-              <a:rPr lang="fr-FR" smtClean="0"/>
+              <a:rPr lang="fr-FR"/>
               <a:t>Quatrième niveau</a:t>
             </a:r>
           </a:p>
           <a:p>
             <a:pPr lvl="4"/>
             <a:r>
-              <a:rPr lang="fr-FR" smtClean="0"/>
+              <a:rPr lang="fr-FR"/>
               <a:t>Cinquième niveau</a:t>
             </a:r>
-            <a:endParaRPr lang="fr-FR"/>
           </a:p>
         </p:txBody>
       </p:sp>
@@ -1505,10 +1496,9 @@
           </a:lstStyle>
           <a:p>
             <a:r>
-              <a:rPr lang="fr-FR" smtClean="0"/>
+              <a:rPr lang="fr-FR"/>
               <a:t>Cliquez pour modifier le style du titre</a:t>
             </a:r>
-            <a:endParaRPr lang="fr-FR"/>
           </a:p>
         </p:txBody>
       </p:sp>
@@ -1571,7 +1561,7 @@
           <a:p>
             <a:pPr lvl="0"/>
             <a:r>
-              <a:rPr lang="fr-FR" smtClean="0"/>
+              <a:rPr lang="fr-FR"/>
               <a:t>Cliquez pour modifier les styles du texte du masque</a:t>
             </a:r>
           </a:p>
@@ -1627,38 +1617,37 @@
           <a:p>
             <a:pPr lvl="0"/>
             <a:r>
-              <a:rPr lang="fr-FR" smtClean="0"/>
+              <a:rPr lang="fr-FR"/>
               <a:t>Cliquez pour modifier les styles du texte du masque</a:t>
             </a:r>
           </a:p>
           <a:p>
             <a:pPr lvl="1"/>
             <a:r>
-              <a:rPr lang="fr-FR" smtClean="0"/>
+              <a:rPr lang="fr-FR"/>
               <a:t>Deuxième niveau</a:t>
             </a:r>
           </a:p>
           <a:p>
             <a:pPr lvl="2"/>
             <a:r>
-              <a:rPr lang="fr-FR" smtClean="0"/>
+              <a:rPr lang="fr-FR"/>
               <a:t>Troisième niveau</a:t>
             </a:r>
           </a:p>
           <a:p>
             <a:pPr lvl="3"/>
             <a:r>
-              <a:rPr lang="fr-FR" smtClean="0"/>
+              <a:rPr lang="fr-FR"/>
               <a:t>Quatrième niveau</a:t>
             </a:r>
           </a:p>
           <a:p>
             <a:pPr lvl="4"/>
             <a:r>
-              <a:rPr lang="fr-FR" smtClean="0"/>
+              <a:rPr lang="fr-FR"/>
               <a:t>Cinquième niveau</a:t>
             </a:r>
-            <a:endParaRPr lang="fr-FR"/>
           </a:p>
         </p:txBody>
       </p:sp>
@@ -1721,7 +1710,7 @@
           <a:p>
             <a:pPr lvl="0"/>
             <a:r>
-              <a:rPr lang="fr-FR" smtClean="0"/>
+              <a:rPr lang="fr-FR"/>
               <a:t>Cliquez pour modifier les styles du texte du masque</a:t>
             </a:r>
           </a:p>
@@ -1777,38 +1766,37 @@
           <a:p>
             <a:pPr lvl="0"/>
             <a:r>
-              <a:rPr lang="fr-FR" smtClean="0"/>
+              <a:rPr lang="fr-FR"/>
               <a:t>Cliquez pour modifier les styles du texte du masque</a:t>
             </a:r>
           </a:p>
           <a:p>
             <a:pPr lvl="1"/>
             <a:r>
-              <a:rPr lang="fr-FR" smtClean="0"/>
+              <a:rPr lang="fr-FR"/>
               <a:t>Deuxième niveau</a:t>
             </a:r>
           </a:p>
           <a:p>
             <a:pPr lvl="2"/>
             <a:r>
-              <a:rPr lang="fr-FR" smtClean="0"/>
+              <a:rPr lang="fr-FR"/>
               <a:t>Troisième niveau</a:t>
             </a:r>
           </a:p>
           <a:p>
             <a:pPr lvl="3"/>
             <a:r>
-              <a:rPr lang="fr-FR" smtClean="0"/>
+              <a:rPr lang="fr-FR"/>
               <a:t>Quatrième niveau</a:t>
             </a:r>
           </a:p>
           <a:p>
             <a:pPr lvl="4"/>
             <a:r>
-              <a:rPr lang="fr-FR" smtClean="0"/>
+              <a:rPr lang="fr-FR"/>
               <a:t>Cinquième niveau</a:t>
             </a:r>
-            <a:endParaRPr lang="fr-FR"/>
           </a:p>
         </p:txBody>
       </p:sp>
@@ -1858,10 +1846,9 @@
           <a:lstStyle/>
           <a:p>
             <a:r>
-              <a:rPr lang="fr-FR" smtClean="0"/>
+              <a:rPr lang="fr-FR"/>
               <a:t>Cliquez pour modifier le style du titre</a:t>
             </a:r>
-            <a:endParaRPr lang="fr-FR"/>
           </a:p>
         </p:txBody>
       </p:sp>
@@ -1950,10 +1937,9 @@
           </a:lstStyle>
           <a:p>
             <a:r>
-              <a:rPr lang="fr-FR" smtClean="0"/>
+              <a:rPr lang="fr-FR"/>
               <a:t>Cliquez pour modifier le style du titre</a:t>
             </a:r>
-            <a:endParaRPr lang="fr-FR"/>
           </a:p>
         </p:txBody>
       </p:sp>
@@ -2007,38 +1993,37 @@
           <a:p>
             <a:pPr lvl="0"/>
             <a:r>
-              <a:rPr lang="fr-FR" smtClean="0"/>
+              <a:rPr lang="fr-FR"/>
               <a:t>Cliquez pour modifier les styles du texte du masque</a:t>
             </a:r>
           </a:p>
           <a:p>
             <a:pPr lvl="1"/>
             <a:r>
-              <a:rPr lang="fr-FR" smtClean="0"/>
+              <a:rPr lang="fr-FR"/>
               <a:t>Deuxième niveau</a:t>
             </a:r>
           </a:p>
           <a:p>
             <a:pPr lvl="2"/>
             <a:r>
-              <a:rPr lang="fr-FR" smtClean="0"/>
+              <a:rPr lang="fr-FR"/>
               <a:t>Troisième niveau</a:t>
             </a:r>
           </a:p>
           <a:p>
             <a:pPr lvl="3"/>
             <a:r>
-              <a:rPr lang="fr-FR" smtClean="0"/>
+              <a:rPr lang="fr-FR"/>
               <a:t>Quatrième niveau</a:t>
             </a:r>
           </a:p>
           <a:p>
             <a:pPr lvl="4"/>
             <a:r>
-              <a:rPr lang="fr-FR" smtClean="0"/>
+              <a:rPr lang="fr-FR"/>
               <a:t>Cinquième niveau</a:t>
             </a:r>
-            <a:endParaRPr lang="fr-FR"/>
           </a:p>
         </p:txBody>
       </p:sp>
@@ -2101,7 +2086,7 @@
           <a:p>
             <a:pPr lvl="0"/>
             <a:r>
-              <a:rPr lang="fr-FR" smtClean="0"/>
+              <a:rPr lang="fr-FR"/>
               <a:t>Cliquez pour modifier les styles du texte du masque</a:t>
             </a:r>
           </a:p>
@@ -2162,10 +2147,9 @@
           </a:lstStyle>
           <a:p>
             <a:r>
-              <a:rPr lang="fr-FR" smtClean="0"/>
+              <a:rPr lang="fr-FR"/>
               <a:t>Cliquez pour modifier le style du titre</a:t>
             </a:r>
-            <a:endParaRPr lang="fr-FR"/>
           </a:p>
         </p:txBody>
       </p:sp>
@@ -2227,7 +2211,7 @@
           </a:lstStyle>
           <a:p>
             <a:pPr lvl="0"/>
-            <a:endParaRPr lang="fr-FR" noProof="0" smtClean="0"/>
+            <a:endParaRPr lang="fr-FR" noProof="0"/>
           </a:p>
         </p:txBody>
       </p:sp>
@@ -2290,7 +2274,7 @@
           <a:p>
             <a:pPr lvl="0"/>
             <a:r>
-              <a:rPr lang="fr-FR" smtClean="0"/>
+              <a:rPr lang="fr-FR"/>
               <a:t>Cliquez pour modifier les styles du texte du masque</a:t>
             </a:r>
           </a:p>
@@ -2342,10 +2326,9 @@
           <a:lstStyle/>
           <a:p>
             <a:r>
-              <a:rPr lang="fr-FR" smtClean="0"/>
+              <a:rPr lang="fr-FR"/>
               <a:t>Cliquez pour modifier le style du titre</a:t>
             </a:r>
-            <a:endParaRPr lang="fr-FR"/>
           </a:p>
         </p:txBody>
       </p:sp>
@@ -2366,38 +2349,37 @@
           <a:p>
             <a:pPr lvl="0"/>
             <a:r>
-              <a:rPr lang="fr-FR" smtClean="0"/>
+              <a:rPr lang="fr-FR"/>
               <a:t>Cliquez pour modifier les styles du texte du masque</a:t>
             </a:r>
           </a:p>
           <a:p>
             <a:pPr lvl="1"/>
             <a:r>
-              <a:rPr lang="fr-FR" smtClean="0"/>
+              <a:rPr lang="fr-FR"/>
               <a:t>Deuxième niveau</a:t>
             </a:r>
           </a:p>
           <a:p>
             <a:pPr lvl="2"/>
             <a:r>
-              <a:rPr lang="fr-FR" smtClean="0"/>
+              <a:rPr lang="fr-FR"/>
               <a:t>Troisième niveau</a:t>
             </a:r>
           </a:p>
           <a:p>
             <a:pPr lvl="3"/>
             <a:r>
-              <a:rPr lang="fr-FR" smtClean="0"/>
+              <a:rPr lang="fr-FR"/>
               <a:t>Quatrième niveau</a:t>
             </a:r>
           </a:p>
           <a:p>
             <a:pPr lvl="4"/>
             <a:r>
-              <a:rPr lang="fr-FR" smtClean="0"/>
+              <a:rPr lang="fr-FR"/>
               <a:t>Cinquième niveau</a:t>
             </a:r>
-            <a:endParaRPr lang="fr-FR"/>
           </a:p>
         </p:txBody>
       </p:sp>
@@ -2578,7 +2560,7 @@
             <a:pPr eaLnBrk="1" hangingPunct="1">
               <a:defRPr/>
             </a:pPr>
-            <a:endParaRPr lang="fr-FR" altLang="fr-FR" smtClean="0"/>
+            <a:endParaRPr lang="fr-FR" altLang="fr-FR"/>
           </a:p>
         </p:txBody>
       </p:sp>
@@ -2732,7 +2714,7 @@
               <a:defRPr/>
             </a:pPr>
             <a:r>
-              <a:rPr lang="fr-FR" sz="1200" dirty="0" smtClean="0"/>
+              <a:rPr lang="fr-FR" sz="1200" dirty="0"/>
               <a:t>Page </a:t>
             </a:r>
             <a:fld id="{E218E9B1-FD08-4C80-902E-210BA2967D0D}" type="slidenum">
@@ -2745,7 +2727,7 @@
               </a:pPr>
               <a:t>‹N°›</a:t>
             </a:fld>
-            <a:endParaRPr lang="fr-FR" dirty="0" smtClean="0">
+            <a:endParaRPr lang="fr-FR" dirty="0">
               <a:latin typeface="Times New Roman" pitchFamily="18" charset="0"/>
             </a:endParaRPr>
           </a:p>
@@ -2901,10 +2883,10 @@
               <a:defRPr/>
             </a:pPr>
             <a:r>
-              <a:rPr lang="fr-FR" sz="1600" dirty="0" smtClean="0"/>
+              <a:rPr lang="fr-FR" sz="1600" dirty="0"/>
               <a:t>Python</a:t>
             </a:r>
-            <a:endParaRPr lang="fr-FR" dirty="0" smtClean="0">
+            <a:endParaRPr lang="fr-FR" dirty="0">
               <a:latin typeface="Times New Roman" pitchFamily="18" charset="0"/>
             </a:endParaRPr>
           </a:p>
@@ -2962,7 +2944,7 @@
           <a:p>
             <a:pPr lvl="0"/>
             <a:r>
-              <a:rPr lang="fr-FR" altLang="fr-FR" smtClean="0"/>
+              <a:rPr lang="fr-FR" altLang="fr-FR"/>
               <a:t>Cliquez pour modifier le style du titre du masque</a:t>
             </a:r>
           </a:p>
@@ -3020,35 +3002,35 @@
           <a:p>
             <a:pPr lvl="0"/>
             <a:r>
-              <a:rPr lang="fr-FR" altLang="fr-FR" smtClean="0"/>
+              <a:rPr lang="fr-FR" altLang="fr-FR"/>
               <a:t>Cliquez pour modifier les styles du texte du masque</a:t>
             </a:r>
           </a:p>
           <a:p>
             <a:pPr lvl="1"/>
             <a:r>
-              <a:rPr lang="fr-FR" altLang="fr-FR" smtClean="0"/>
+              <a:rPr lang="fr-FR" altLang="fr-FR"/>
               <a:t>Deuxième niveau</a:t>
             </a:r>
           </a:p>
           <a:p>
             <a:pPr lvl="2"/>
             <a:r>
-              <a:rPr lang="fr-FR" altLang="fr-FR" smtClean="0"/>
+              <a:rPr lang="fr-FR" altLang="fr-FR"/>
               <a:t>Troisième niveau</a:t>
             </a:r>
           </a:p>
           <a:p>
             <a:pPr lvl="3"/>
             <a:r>
-              <a:rPr lang="fr-FR" altLang="fr-FR" smtClean="0"/>
+              <a:rPr lang="fr-FR" altLang="fr-FR"/>
               <a:t>Quatrième niveau</a:t>
             </a:r>
           </a:p>
           <a:p>
             <a:pPr lvl="4"/>
             <a:r>
-              <a:rPr lang="fr-FR" altLang="fr-FR" smtClean="0"/>
+              <a:rPr lang="fr-FR" altLang="fr-FR"/>
               <a:t>Cinquième niveau</a:t>
             </a:r>
           </a:p>
@@ -3204,10 +3186,10 @@
               <a:defRPr/>
             </a:pPr>
             <a:r>
-              <a:rPr lang="fr-FR" sz="1200" smtClean="0"/>
+              <a:rPr lang="fr-FR" sz="1200"/>
               <a:t>© Cyril Vincent Conseil</a:t>
             </a:r>
-            <a:endParaRPr lang="fr-FR" smtClean="0">
+            <a:endParaRPr lang="fr-FR">
               <a:latin typeface="Times New Roman" pitchFamily="18" charset="0"/>
             </a:endParaRPr>
           </a:p>
@@ -3689,19 +3671,15 @@
           <a:p>
             <a:pPr eaLnBrk="1" hangingPunct="1"/>
             <a:r>
-              <a:rPr lang="fr-FR" altLang="fr-FR" smtClean="0"/>
-              <a:t>Chapitre </a:t>
-            </a:r>
-            <a:r>
-              <a:rPr lang="fr-FR" altLang="fr-FR" smtClean="0"/>
-              <a:t>4</a:t>
-            </a:r>
-            <a:endParaRPr lang="fr-FR" altLang="fr-FR" dirty="0" smtClean="0"/>
+              <a:rPr lang="fr-FR" altLang="fr-FR"/>
+              <a:t>Chapitre 4</a:t>
+            </a:r>
+            <a:endParaRPr lang="fr-FR" altLang="fr-FR" dirty="0"/>
           </a:p>
           <a:p>
             <a:pPr eaLnBrk="1" hangingPunct="1"/>
             <a:r>
-              <a:rPr lang="fr-FR" altLang="fr-FR" dirty="0" smtClean="0"/>
+              <a:rPr lang="fr-FR" altLang="fr-FR" dirty="0"/>
               <a:t>PIP</a:t>
             </a:r>
           </a:p>
@@ -3753,13 +3731,6 @@
   <p:clrMapOvr>
     <a:masterClrMapping/>
   </p:clrMapOvr>
-  <p:timing>
-    <p:tnLst>
-      <p:par>
-        <p:cTn id="1" dur="indefinite" restart="never" nodeType="tmRoot"/>
-      </p:par>
-    </p:tnLst>
-  </p:timing>
 </p:sld>
 </file>
 
@@ -3796,10 +3767,9 @@
           <a:lstStyle/>
           <a:p>
             <a:r>
-              <a:rPr lang="fr-FR" dirty="0" smtClean="0"/>
+              <a:rPr lang="fr-FR" dirty="0"/>
               <a:t>PIP</a:t>
             </a:r>
-            <a:endParaRPr lang="fr-FR" dirty="0"/>
           </a:p>
         </p:txBody>
       </p:sp>
@@ -3819,139 +3789,115 @@
           <a:lstStyle/>
           <a:p>
             <a:r>
-              <a:rPr lang="fr-FR" dirty="0" smtClean="0"/>
+              <a:rPr lang="fr-FR" dirty="0"/>
               <a:t>Gestionnaire de package Python</a:t>
             </a:r>
           </a:p>
           <a:p>
             <a:pPr lvl="1"/>
             <a:r>
-              <a:rPr lang="fr-FR" dirty="0" smtClean="0"/>
+              <a:rPr lang="fr-FR" dirty="0"/>
               <a:t>PIP Install Package</a:t>
             </a:r>
           </a:p>
           <a:p>
             <a:r>
-              <a:rPr lang="fr-FR" dirty="0" smtClean="0"/>
+              <a:rPr lang="fr-FR" dirty="0"/>
               <a:t>Dépôt de package</a:t>
             </a:r>
           </a:p>
           <a:p>
             <a:pPr lvl="1"/>
             <a:r>
-              <a:rPr lang="fr-FR" dirty="0" smtClean="0"/>
+              <a:rPr lang="fr-FR" dirty="0"/>
               <a:t>Python Package Index </a:t>
             </a:r>
             <a:r>
-              <a:rPr lang="fr-FR" dirty="0" err="1" smtClean="0"/>
+              <a:rPr lang="fr-FR" dirty="0" err="1"/>
               <a:t>PyPI</a:t>
             </a:r>
-            <a:endParaRPr lang="fr-FR" dirty="0" smtClean="0"/>
-          </a:p>
-          <a:p>
-            <a:r>
-              <a:rPr lang="fr-FR" dirty="0" smtClean="0"/>
+            <a:endParaRPr lang="fr-FR" dirty="0"/>
+          </a:p>
+          <a:p>
+            <a:r>
+              <a:rPr lang="fr-FR" dirty="0"/>
               <a:t>Utilisation</a:t>
             </a:r>
           </a:p>
           <a:p>
             <a:pPr lvl="1"/>
             <a:r>
-              <a:rPr lang="fr-FR" dirty="0" smtClean="0"/>
+              <a:rPr lang="fr-FR" dirty="0"/>
               <a:t>PIP </a:t>
             </a:r>
             <a:r>
-              <a:rPr lang="fr-FR" dirty="0" err="1" smtClean="0"/>
+              <a:rPr lang="fr-FR" dirty="0" err="1"/>
               <a:t>install</a:t>
             </a:r>
             <a:r>
-              <a:rPr lang="fr-FR" dirty="0" smtClean="0"/>
+              <a:rPr lang="fr-FR" dirty="0"/>
               <a:t> </a:t>
             </a:r>
             <a:r>
-              <a:rPr lang="fr-FR" dirty="0" err="1" smtClean="0"/>
+              <a:rPr lang="fr-FR" dirty="0" err="1"/>
               <a:t>packageName</a:t>
             </a:r>
-            <a:endParaRPr lang="fr-FR" dirty="0" smtClean="0"/>
+            <a:endParaRPr lang="fr-FR" dirty="0"/>
           </a:p>
           <a:p>
             <a:pPr lvl="1"/>
             <a:r>
-              <a:rPr lang="fr-FR" dirty="0" smtClean="0"/>
+              <a:rPr lang="fr-FR" dirty="0"/>
               <a:t>PIP </a:t>
             </a:r>
             <a:r>
-              <a:rPr lang="fr-FR" dirty="0" err="1" smtClean="0"/>
+              <a:rPr lang="fr-FR" dirty="0" err="1"/>
               <a:t>uninstall</a:t>
             </a:r>
             <a:r>
-              <a:rPr lang="fr-FR" dirty="0" smtClean="0"/>
+              <a:rPr lang="fr-FR" dirty="0"/>
               <a:t> </a:t>
             </a:r>
             <a:r>
-              <a:rPr lang="fr-FR" dirty="0" err="1" smtClean="0"/>
+              <a:rPr lang="fr-FR" dirty="0" err="1"/>
               <a:t>packageName</a:t>
             </a:r>
-            <a:endParaRPr lang="fr-FR" dirty="0" smtClean="0"/>
+            <a:endParaRPr lang="fr-FR" dirty="0"/>
           </a:p>
           <a:p>
             <a:pPr lvl="1"/>
             <a:r>
-              <a:rPr lang="fr-FR" dirty="0" smtClean="0"/>
+              <a:rPr lang="fr-FR" dirty="0"/>
               <a:t>PIP </a:t>
             </a:r>
             <a:r>
-              <a:rPr lang="fr-FR" dirty="0" err="1" smtClean="0"/>
+              <a:rPr lang="fr-FR" dirty="0" err="1"/>
               <a:t>install</a:t>
             </a:r>
             <a:r>
-              <a:rPr lang="fr-FR" dirty="0" smtClean="0"/>
-              <a:t> –r requirement.txt</a:t>
+              <a:rPr lang="fr-FR" dirty="0"/>
+              <a:t> –r requirements.txt</a:t>
+            </a:r>
+          </a:p>
+          <a:p>
+            <a:r>
+              <a:rPr lang="fr-FR" dirty="0"/>
+              <a:t>Génération du requirements.txt</a:t>
+            </a:r>
+          </a:p>
+          <a:p>
+            <a:pPr lvl="1"/>
+            <a:r>
+              <a:rPr lang="fr-FR" dirty="0" err="1"/>
+              <a:t>Pip</a:t>
+            </a:r>
+            <a:r>
+              <a:rPr lang="fr-FR" dirty="0"/>
+              <a:t> freeze &gt; requirements.txt</a:t>
             </a:r>
           </a:p>
         </p:txBody>
       </p:sp>
-      <p:pic>
-        <p:nvPicPr>
-          <p:cNvPr id="1026" name="Picture 2" descr="https://upload.wikimedia.org/wikipedia/commons/0/02/Pip_help.png"/>
-          <p:cNvPicPr>
-            <a:picLocks noChangeAspect="1" noChangeArrowheads="1"/>
-          </p:cNvPicPr>
-          <p:nvPr/>
-        </p:nvPicPr>
-        <p:blipFill>
-          <a:blip r:embed="rId2">
-            <a:extLst>
-              <a:ext uri="{28A0092B-C50C-407E-A947-70E740481C1C}">
-                <a14:useLocalDpi xmlns:a14="http://schemas.microsoft.com/office/drawing/2010/main" val="0"/>
-              </a:ext>
-            </a:extLst>
-          </a:blip>
-          <a:srcRect/>
-          <a:stretch>
-            <a:fillRect/>
-          </a:stretch>
-        </p:blipFill>
-        <p:spPr bwMode="auto">
-          <a:xfrm>
-            <a:off x="4932040" y="3501008"/>
-            <a:ext cx="6663191" cy="3357421"/>
-          </a:xfrm>
-          <a:prstGeom prst="rect">
-            <a:avLst/>
-          </a:prstGeom>
-          <a:noFill/>
-          <a:extLst>
-            <a:ext uri="{909E8E84-426E-40DD-AFC4-6F175D3DCCD1}">
-              <a14:hiddenFill xmlns:a14="http://schemas.microsoft.com/office/drawing/2010/main">
-                <a:solidFill>
-                  <a:srgbClr val="FFFFFF"/>
-                </a:solidFill>
-              </a14:hiddenFill>
-            </a:ext>
-          </a:extLst>
-        </p:spPr>
-      </p:pic>
     </p:spTree>
     <p:extLst>
       <p:ext uri="{BB962C8B-B14F-4D97-AF65-F5344CB8AC3E}">
@@ -3962,13 +3908,6 @@
   <p:clrMapOvr>
     <a:masterClrMapping/>
   </p:clrMapOvr>
-  <p:timing>
-    <p:tnLst>
-      <p:par>
-        <p:cTn id="1" dur="indefinite" restart="never" nodeType="tmRoot"/>
-      </p:par>
-    </p:tnLst>
-  </p:timing>
 </p:sld>
 </file>
 
